--- a/report/Final_Report.pptx
+++ b/report/Final_Report.pptx
@@ -121,6 +121,9 @@
           </p14:sldIdLst>
         </p14:section>
       </p14:sectionLst>
+    </p:ext>
+    <p:ext uri="{EFAFB233-063F-42B5-8137-9DF3F51BA10A}">
+      <p15:sldGuideLst xmlns:p15="http://schemas.microsoft.com/office/powerpoint/2012/main"/>
     </p:ext>
   </p:extLst>
 </p:presentation>
@@ -4682,7 +4685,7 @@
           <a:p>
             <a:fld id="{CF069260-AA94-4C8E-9549-1F9284E2A0A4}" type="datetimeFigureOut">
               <a:rPr lang="en-IN" smtClean="0"/>
-              <a:t>15-12-2025</a:t>
+              <a:t>20-12-2025</a:t>
             </a:fld>
             <a:endParaRPr lang="en-IN"/>
           </a:p>
@@ -4882,7 +4885,7 @@
           <a:p>
             <a:fld id="{CF069260-AA94-4C8E-9549-1F9284E2A0A4}" type="datetimeFigureOut">
               <a:rPr lang="en-IN" smtClean="0"/>
-              <a:t>15-12-2025</a:t>
+              <a:t>20-12-2025</a:t>
             </a:fld>
             <a:endParaRPr lang="en-IN"/>
           </a:p>
@@ -5092,7 +5095,7 @@
           <a:p>
             <a:fld id="{CF069260-AA94-4C8E-9549-1F9284E2A0A4}" type="datetimeFigureOut">
               <a:rPr lang="en-IN" smtClean="0"/>
-              <a:t>15-12-2025</a:t>
+              <a:t>20-12-2025</a:t>
             </a:fld>
             <a:endParaRPr lang="en-IN"/>
           </a:p>
@@ -5292,7 +5295,7 @@
           <a:p>
             <a:fld id="{CF069260-AA94-4C8E-9549-1F9284E2A0A4}" type="datetimeFigureOut">
               <a:rPr lang="en-IN" smtClean="0"/>
-              <a:t>15-12-2025</a:t>
+              <a:t>20-12-2025</a:t>
             </a:fld>
             <a:endParaRPr lang="en-IN"/>
           </a:p>
@@ -5568,7 +5571,7 @@
           <a:p>
             <a:fld id="{CF069260-AA94-4C8E-9549-1F9284E2A0A4}" type="datetimeFigureOut">
               <a:rPr lang="en-IN" smtClean="0"/>
-              <a:t>15-12-2025</a:t>
+              <a:t>20-12-2025</a:t>
             </a:fld>
             <a:endParaRPr lang="en-IN"/>
           </a:p>
@@ -5836,7 +5839,7 @@
           <a:p>
             <a:fld id="{CF069260-AA94-4C8E-9549-1F9284E2A0A4}" type="datetimeFigureOut">
               <a:rPr lang="en-IN" smtClean="0"/>
-              <a:t>15-12-2025</a:t>
+              <a:t>20-12-2025</a:t>
             </a:fld>
             <a:endParaRPr lang="en-IN"/>
           </a:p>
@@ -6251,7 +6254,7 @@
           <a:p>
             <a:fld id="{CF069260-AA94-4C8E-9549-1F9284E2A0A4}" type="datetimeFigureOut">
               <a:rPr lang="en-IN" smtClean="0"/>
-              <a:t>15-12-2025</a:t>
+              <a:t>20-12-2025</a:t>
             </a:fld>
             <a:endParaRPr lang="en-IN"/>
           </a:p>
@@ -6393,7 +6396,7 @@
           <a:p>
             <a:fld id="{CF069260-AA94-4C8E-9549-1F9284E2A0A4}" type="datetimeFigureOut">
               <a:rPr lang="en-IN" smtClean="0"/>
-              <a:t>15-12-2025</a:t>
+              <a:t>20-12-2025</a:t>
             </a:fld>
             <a:endParaRPr lang="en-IN"/>
           </a:p>
@@ -6506,7 +6509,7 @@
           <a:p>
             <a:fld id="{CF069260-AA94-4C8E-9549-1F9284E2A0A4}" type="datetimeFigureOut">
               <a:rPr lang="en-IN" smtClean="0"/>
-              <a:t>15-12-2025</a:t>
+              <a:t>20-12-2025</a:t>
             </a:fld>
             <a:endParaRPr lang="en-IN"/>
           </a:p>
@@ -6819,7 +6822,7 @@
           <a:p>
             <a:fld id="{CF069260-AA94-4C8E-9549-1F9284E2A0A4}" type="datetimeFigureOut">
               <a:rPr lang="en-IN" smtClean="0"/>
-              <a:t>15-12-2025</a:t>
+              <a:t>20-12-2025</a:t>
             </a:fld>
             <a:endParaRPr lang="en-IN"/>
           </a:p>
@@ -7108,7 +7111,7 @@
           <a:p>
             <a:fld id="{CF069260-AA94-4C8E-9549-1F9284E2A0A4}" type="datetimeFigureOut">
               <a:rPr lang="en-IN" smtClean="0"/>
-              <a:t>15-12-2025</a:t>
+              <a:t>20-12-2025</a:t>
             </a:fld>
             <a:endParaRPr lang="en-IN"/>
           </a:p>
@@ -7351,7 +7354,7 @@
           <a:p>
             <a:fld id="{CF069260-AA94-4C8E-9549-1F9284E2A0A4}" type="datetimeFigureOut">
               <a:rPr lang="en-IN" smtClean="0"/>
-              <a:t>15-12-2025</a:t>
+              <a:t>20-12-2025</a:t>
             </a:fld>
             <a:endParaRPr lang="en-IN"/>
           </a:p>
@@ -8078,7 +8081,7 @@
             <p:ph idx="1"/>
             <p:extLst>
               <p:ext uri="{D42A27DB-BD31-4B8C-83A1-F6EECF244321}">
-                <p14:modId xmlns:p14="http://schemas.microsoft.com/office/powerpoint/2010/main" val="4200249089"/>
+                <p14:modId xmlns:p14="http://schemas.microsoft.com/office/powerpoint/2010/main" val="306022423"/>
               </p:ext>
             </p:extLst>
           </p:nvPr>
@@ -8341,7 +8344,7 @@
                 </a:solidFill>
                 <a:latin typeface="Trebuchet MS" panose="020B0603020202020204" pitchFamily="34" charset="0"/>
               </a:rPr>
-              <a:t>How to Use Customer CSAT Score?</a:t>
+              <a:t>How to use CSAT score?</a:t>
             </a:r>
           </a:p>
         </p:txBody>
@@ -8400,7 +8403,7 @@
                 </a:solidFill>
                 <a:latin typeface="Trebuchet MS" panose="020B0603020202020204" pitchFamily="34" charset="0"/>
               </a:rPr>
-              <a:t>Average CSAT Score </a:t>
+              <a:t>Average CSAT score </a:t>
             </a:r>
             <a:r>
               <a:rPr lang="en-IN" sz="4000" dirty="0">
@@ -8514,7 +8517,7 @@
                 </a:solidFill>
                 <a:latin typeface="Trebuchet MS" panose="020B0603020202020204" pitchFamily="34" charset="0"/>
               </a:rPr>
-              <a:t>How to Use</a:t>
+              <a:t>What dives CSAT score?</a:t>
             </a:r>
           </a:p>
         </p:txBody>
@@ -8566,48 +8569,6 @@
             </a:lvl1pPr>
           </a:lstStyle>
           <a:p>
-            <a:r>
-              <a:rPr lang="en-IN" sz="4000" b="1" dirty="0">
-                <a:solidFill>
-                  <a:srgbClr val="1F74BA"/>
-                </a:solidFill>
-                <a:latin typeface="Trebuchet MS" panose="020B0603020202020204" pitchFamily="34" charset="0"/>
-              </a:rPr>
-              <a:t>Average CSAT Score </a:t>
-            </a:r>
-            <a:r>
-              <a:rPr lang="en-IN" sz="4000" dirty="0">
-                <a:latin typeface="Trebuchet MS" panose="020B0603020202020204" pitchFamily="34" charset="0"/>
-              </a:rPr>
-              <a:t>can</a:t>
-            </a:r>
-            <a:r>
-              <a:rPr lang="en-IN" sz="4000" b="1" dirty="0">
-                <a:solidFill>
-                  <a:srgbClr val="1F74BA"/>
-                </a:solidFill>
-                <a:latin typeface="Trebuchet MS" panose="020B0603020202020204" pitchFamily="34" charset="0"/>
-              </a:rPr>
-              <a:t> </a:t>
-            </a:r>
-            <a:r>
-              <a:rPr lang="en-IN" sz="4000" dirty="0">
-                <a:latin typeface="Trebuchet MS" panose="020B0603020202020204" pitchFamily="34" charset="0"/>
-              </a:rPr>
-              <a:t>help identify areas of lower customer satisfaction that may contribute to </a:t>
-            </a:r>
-            <a:r>
-              <a:rPr lang="en-IN" sz="4000" b="1" u="sng" dirty="0">
-                <a:latin typeface="Trebuchet MS" panose="020B0603020202020204" pitchFamily="34" charset="0"/>
-              </a:rPr>
-              <a:t>retention decline</a:t>
-            </a:r>
-            <a:r>
-              <a:rPr lang="en-IN" sz="4000" u="sng" dirty="0">
-                <a:latin typeface="Trebuchet MS" panose="020B0603020202020204" pitchFamily="34" charset="0"/>
-              </a:rPr>
-              <a:t>.</a:t>
-            </a:r>
             <a:endParaRPr lang="en-IN" sz="4000" b="1" u="sng" dirty="0">
               <a:latin typeface="Trebuchet MS" panose="020B0603020202020204" pitchFamily="34" charset="0"/>
             </a:endParaRPr>
